--- a/presentations/09-c-first-contact/09-c-first-contact-lab.pptx
+++ b/presentations/09-c-first-contact/09-c-first-contact-lab.pptx
@@ -135,7 +135,7 @@
   <p:extLst>
     <p:ext uri="{521415D9-36F7-43E2-AB2F-B90AF26B5E84}">
       <p14:sectionLst xmlns:p14="http://schemas.microsoft.com/office/powerpoint/2010/main">
-        <p14:section name="Opening" id="{f7b5e174-9bfe-f6e2-9cef-208d02d61b84}">
+        <p14:section name="Opening" id="{844299c1-f091-fa3c-7b7f-869501f11e32}">
           <p14:sldIdLst>
             <p14:sldId id="256"/>
             <p14:sldId id="257"/>
@@ -143,7 +143,7 @@
             <p14:sldId id="259"/>
           </p14:sldIdLst>
         </p14:section>
-        <p14:section name="Skeleton" id="{2baa0779-ea7a-e284-1bcb-21b846c77bfb}">
+        <p14:section name="Skeleton" id="{72ee8422-75a8-b7e7-9d52-95af9142bf4f}">
           <p14:sldIdLst>
             <p14:sldId id="260"/>
             <p14:sldId id="261"/>
@@ -151,7 +151,7 @@
             <p14:sldId id="263"/>
           </p14:sldIdLst>
         </p14:section>
-        <p14:section name="State and draw" id="{701206ff-836b-5a04-0e10-8310de0abd10}">
+        <p14:section name="State and draw" id="{640271eb-2cda-72a5-82fe-db09f9696c4d}">
           <p14:sldIdLst>
             <p14:sldId id="264"/>
             <p14:sldId id="265"/>
@@ -159,21 +159,21 @@
             <p14:sldId id="267"/>
           </p14:sldIdLst>
         </p14:section>
-        <p14:section name="Paddle" id="{2e4cc65e-c18d-ce00-f95c-297507fc2640}">
+        <p14:section name="Paddle" id="{164ffdd2-2cca-8f26-fe1b-151e24139d22}">
           <p14:sldIdLst>
             <p14:sldId id="268"/>
             <p14:sldId id="269"/>
             <p14:sldId id="270"/>
           </p14:sldIdLst>
         </p14:section>
-        <p14:section name="Ball" id="{ee83876b-492e-c45d-9254-79ccf7108ba2}">
+        <p14:section name="Ball" id="{ed480235-0c96-9f73-877f-3b32dbc269a0}">
           <p14:sldIdLst>
             <p14:sldId id="271"/>
             <p14:sldId id="272"/>
             <p14:sldId id="273"/>
           </p14:sldIdLst>
         </p14:section>
-        <p14:section name="Collision" id="{97cc7e02-a84f-ebff-100f-7e04016edd03}">
+        <p14:section name="Collision" id="{4aa5ce17-d931-0311-1a77-66494cb14e29}">
           <p14:sldIdLst>
             <p14:sldId id="274"/>
             <p14:sldId id="275"/>
@@ -181,7 +181,7 @@
             <p14:sldId id="277"/>
           </p14:sldIdLst>
         </p14:section>
-        <p14:section name="Score" id="{8ab59220-5032-ae77-e667-792d93b5ae3b}">
+        <p14:section name="Score" id="{4a18b1ea-03d4-4252-ae81-d890560d7909}">
           <p14:sldIdLst>
             <p14:sldId id="278"/>
             <p14:sldId id="279"/>
@@ -191,7 +191,7 @@
             <p14:sldId id="283"/>
           </p14:sldIdLst>
         </p14:section>
-        <p14:section name="Closing" id="{0f3e014a-e5a6-42fa-6ed0-c23d514bfd0e}">
+        <p14:section name="Closing" id="{14ae560a-dba1-2a05-274f-56ddeb8f1406}">
           <p14:sldIdLst>
             <p14:sldId id="284"/>
           </p14:sldIdLst>
@@ -6384,7 +6384,7 @@
               <a:buNone/>
             </a:pPr>
             <a:r>
-              <a:rPr lang="en-US" sz="1150" dirty="0">
+              <a:rPr lang="en-US" sz="1350" dirty="0">
                 <a:solidFill>
                   <a:srgbClr val="E6EDF2"/>
                 </a:solidFill>
@@ -6394,14 +6394,14 @@
               </a:rPr>
               <a:t>void pong_c_update(void) {</a:t>
             </a:r>
-            <a:endParaRPr lang="en-US" sz="1150" dirty="0"/>
-          </a:p>
-          <a:p>
-            <a:pPr indent="0" marL="0">
-              <a:buNone/>
-            </a:pPr>
-            <a:r>
-              <a:rPr lang="en-US" sz="1150" dirty="0">
+            <a:endParaRPr lang="en-US" sz="1350" dirty="0"/>
+          </a:p>
+          <a:p>
+            <a:pPr indent="0" marL="0">
+              <a:buNone/>
+            </a:pPr>
+            <a:r>
+              <a:rPr lang="en-US" sz="1350" dirty="0">
                 <a:solidFill>
                   <a:srgbClr val="E6EDF2"/>
                 </a:solidFill>
@@ -6411,14 +6411,14 @@
               </a:rPr>
               <a:t>    uint32_t input = prg32_input_read();</a:t>
             </a:r>
-            <a:endParaRPr lang="en-US" sz="1150" dirty="0"/>
-          </a:p>
-          <a:p>
-            <a:pPr indent="0" marL="0">
-              <a:buNone/>
-            </a:pPr>
-            <a:r>
-              <a:rPr lang="en-US" sz="1150" dirty="0">
+            <a:endParaRPr lang="en-US" sz="1350" dirty="0"/>
+          </a:p>
+          <a:p>
+            <a:pPr indent="0" marL="0">
+              <a:buNone/>
+            </a:pPr>
+            <a:r>
+              <a:rPr lang="en-US" sz="1350" dirty="0">
                 <a:solidFill>
                   <a:srgbClr val="E6EDF2"/>
                 </a:solidFill>
@@ -6428,14 +6428,14 @@
               </a:rPr>
               <a:t>    if (input &amp; PRG32_BTN_LEFT) {</a:t>
             </a:r>
-            <a:endParaRPr lang="en-US" sz="1150" dirty="0"/>
-          </a:p>
-          <a:p>
-            <a:pPr indent="0" marL="0">
-              <a:buNone/>
-            </a:pPr>
-            <a:r>
-              <a:rPr lang="en-US" sz="1150" dirty="0">
+            <a:endParaRPr lang="en-US" sz="1350" dirty="0"/>
+          </a:p>
+          <a:p>
+            <a:pPr indent="0" marL="0">
+              <a:buNone/>
+            </a:pPr>
+            <a:r>
+              <a:rPr lang="en-US" sz="1350" dirty="0">
                 <a:solidFill>
                   <a:srgbClr val="E6EDF2"/>
                 </a:solidFill>
@@ -6445,14 +6445,14 @@
               </a:rPr>
               <a:t>        paddle_x -= 3;</a:t>
             </a:r>
-            <a:endParaRPr lang="en-US" sz="1150" dirty="0"/>
-          </a:p>
-          <a:p>
-            <a:pPr indent="0" marL="0">
-              <a:buNone/>
-            </a:pPr>
-            <a:r>
-              <a:rPr lang="en-US" sz="1150" dirty="0">
+            <a:endParaRPr lang="en-US" sz="1350" dirty="0"/>
+          </a:p>
+          <a:p>
+            <a:pPr indent="0" marL="0">
+              <a:buNone/>
+            </a:pPr>
+            <a:r>
+              <a:rPr lang="en-US" sz="1350" dirty="0">
                 <a:solidFill>
                   <a:srgbClr val="E6EDF2"/>
                 </a:solidFill>
@@ -6462,14 +6462,14 @@
               </a:rPr>
               <a:t>    }</a:t>
             </a:r>
-            <a:endParaRPr lang="en-US" sz="1150" dirty="0"/>
-          </a:p>
-          <a:p>
-            <a:pPr indent="0" marL="0">
-              <a:buNone/>
-            </a:pPr>
-            <a:r>
-              <a:rPr lang="en-US" sz="1150" dirty="0">
+            <a:endParaRPr lang="en-US" sz="1350" dirty="0"/>
+          </a:p>
+          <a:p>
+            <a:pPr indent="0" marL="0">
+              <a:buNone/>
+            </a:pPr>
+            <a:r>
+              <a:rPr lang="en-US" sz="1350" dirty="0">
                 <a:solidFill>
                   <a:srgbClr val="E6EDF2"/>
                 </a:solidFill>
@@ -6479,14 +6479,14 @@
               </a:rPr>
               <a:t>    if (input &amp; PRG32_BTN_RIGHT) {</a:t>
             </a:r>
-            <a:endParaRPr lang="en-US" sz="1150" dirty="0"/>
-          </a:p>
-          <a:p>
-            <a:pPr indent="0" marL="0">
-              <a:buNone/>
-            </a:pPr>
-            <a:r>
-              <a:rPr lang="en-US" sz="1150" dirty="0">
+            <a:endParaRPr lang="en-US" sz="1350" dirty="0"/>
+          </a:p>
+          <a:p>
+            <a:pPr indent="0" marL="0">
+              <a:buNone/>
+            </a:pPr>
+            <a:r>
+              <a:rPr lang="en-US" sz="1350" dirty="0">
                 <a:solidFill>
                   <a:srgbClr val="E6EDF2"/>
                 </a:solidFill>
@@ -6496,14 +6496,14 @@
               </a:rPr>
               <a:t>        paddle_x += 3;</a:t>
             </a:r>
-            <a:endParaRPr lang="en-US" sz="1150" dirty="0"/>
-          </a:p>
-          <a:p>
-            <a:pPr indent="0" marL="0">
-              <a:buNone/>
-            </a:pPr>
-            <a:r>
-              <a:rPr lang="en-US" sz="1150" dirty="0">
+            <a:endParaRPr lang="en-US" sz="1350" dirty="0"/>
+          </a:p>
+          <a:p>
+            <a:pPr indent="0" marL="0">
+              <a:buNone/>
+            </a:pPr>
+            <a:r>
+              <a:rPr lang="en-US" sz="1350" dirty="0">
                 <a:solidFill>
                   <a:srgbClr val="E6EDF2"/>
                 </a:solidFill>
@@ -6513,14 +6513,14 @@
               </a:rPr>
               <a:t>    }</a:t>
             </a:r>
-            <a:endParaRPr lang="en-US" sz="1150" dirty="0"/>
-          </a:p>
-          <a:p>
-            <a:pPr indent="0" marL="0">
-              <a:buNone/>
-            </a:pPr>
-            <a:r>
-              <a:rPr lang="en-US" sz="1150" dirty="0">
+            <a:endParaRPr lang="en-US" sz="1350" dirty="0"/>
+          </a:p>
+          <a:p>
+            <a:pPr indent="0" marL="0">
+              <a:buNone/>
+            </a:pPr>
+            <a:r>
+              <a:rPr lang="en-US" sz="1350" dirty="0">
                 <a:solidFill>
                   <a:srgbClr val="E6EDF2"/>
                 </a:solidFill>
@@ -6530,14 +6530,14 @@
               </a:rPr>
               <a:t>    if (paddle_x &lt; 0)   { paddle_x = 0; }</a:t>
             </a:r>
-            <a:endParaRPr lang="en-US" sz="1150" dirty="0"/>
-          </a:p>
-          <a:p>
-            <a:pPr indent="0" marL="0">
-              <a:buNone/>
-            </a:pPr>
-            <a:r>
-              <a:rPr lang="en-US" sz="1150" dirty="0">
+            <a:endParaRPr lang="en-US" sz="1350" dirty="0"/>
+          </a:p>
+          <a:p>
+            <a:pPr indent="0" marL="0">
+              <a:buNone/>
+            </a:pPr>
+            <a:r>
+              <a:rPr lang="en-US" sz="1350" dirty="0">
                 <a:solidFill>
                   <a:srgbClr val="E6EDF2"/>
                 </a:solidFill>
@@ -6551,7 +6551,7 @@
               <a:buNone/>
             </a:pPr>
             <a:r>
-              <a:rPr lang="en-US" sz="1150" dirty="0">
+              <a:rPr lang="en-US" sz="1350" dirty="0">
                 <a:solidFill>
                   <a:srgbClr val="8FB3A0"/>
                 </a:solidFill>
@@ -6559,16 +6559,16 @@
                 <a:ea typeface="Courier New" pitchFamily="34" charset="-122"/>
                 <a:cs typeface="Courier New" pitchFamily="34" charset="-120"/>
               </a:rPr>
-              <a:t>/* 320 - 64-wide paddle */</a:t>
-            </a:r>
-            <a:endParaRPr lang="en-US" sz="1150" dirty="0"/>
-          </a:p>
-          <a:p>
-            <a:pPr indent="0" marL="0">
-              <a:buNone/>
-            </a:pPr>
-            <a:r>
-              <a:rPr lang="en-US" sz="1150" dirty="0">
+              <a:t>/* 320 - 64-wide</a:t>
+            </a:r>
+            <a:endParaRPr lang="en-US" sz="1350" dirty="0"/>
+          </a:p>
+          <a:p>
+            <a:pPr indent="0" marL="0">
+              <a:buNone/>
+            </a:pPr>
+            <a:r>
+              <a:rPr lang="en-US" sz="1350" dirty="0">
                 <a:solidFill>
                   <a:srgbClr val="E6EDF2"/>
                 </a:solidFill>
@@ -6576,9 +6576,26 @@
                 <a:ea typeface="Courier New" pitchFamily="34" charset="-122"/>
                 <a:cs typeface="Courier New" pitchFamily="34" charset="-120"/>
               </a:rPr>
+              <a:t>        paddle */</a:t>
+            </a:r>
+            <a:endParaRPr lang="en-US" sz="1350" dirty="0"/>
+          </a:p>
+          <a:p>
+            <a:pPr indent="0" marL="0">
+              <a:buNone/>
+            </a:pPr>
+            <a:r>
+              <a:rPr lang="en-US" sz="1350" dirty="0">
+                <a:solidFill>
+                  <a:srgbClr val="E6EDF2"/>
+                </a:solidFill>
+                <a:latin typeface="Courier New" pitchFamily="34" charset="0"/>
+                <a:ea typeface="Courier New" pitchFamily="34" charset="-122"/>
+                <a:cs typeface="Courier New" pitchFamily="34" charset="-120"/>
+              </a:rPr>
               <a:t>}</a:t>
             </a:r>
-            <a:endParaRPr lang="en-US" sz="1150" dirty="0"/>
+            <a:endParaRPr lang="en-US" sz="1350" dirty="0"/>
           </a:p>
         </p:txBody>
       </p:sp>
@@ -11604,7 +11621,7 @@
               <a:buNone/>
             </a:pPr>
             <a:r>
-              <a:rPr lang="en-US" sz="1100" dirty="0">
+              <a:rPr lang="en-US" sz="1250" dirty="0">
                 <a:solidFill>
                   <a:srgbClr val="E6EDF2"/>
                 </a:solidFill>
@@ -11614,14 +11631,14 @@
               </a:rPr>
               <a:t>    if (prg32_sprite_hitbox(ball_x, ball_y, 8, 8,</a:t>
             </a:r>
-            <a:endParaRPr lang="en-US" sz="1100" dirty="0"/>
-          </a:p>
-          <a:p>
-            <a:pPr indent="0" marL="0">
-              <a:buNone/>
-            </a:pPr>
-            <a:r>
-              <a:rPr lang="en-US" sz="1100" dirty="0">
+            <a:endParaRPr lang="en-US" sz="1250" dirty="0"/>
+          </a:p>
+          <a:p>
+            <a:pPr indent="0" marL="0">
+              <a:buNone/>
+            </a:pPr>
+            <a:r>
+              <a:rPr lang="en-US" sz="1250" dirty="0">
                 <a:solidFill>
                   <a:srgbClr val="E6EDF2"/>
                 </a:solidFill>
@@ -11631,14 +11648,14 @@
               </a:rPr>
               <a:t>                            paddle_x, 188, 64, 8)) {</a:t>
             </a:r>
-            <a:endParaRPr lang="en-US" sz="1100" dirty="0"/>
-          </a:p>
-          <a:p>
-            <a:pPr indent="0" marL="0">
-              <a:buNone/>
-            </a:pPr>
-            <a:r>
-              <a:rPr lang="en-US" sz="1100" dirty="0">
+            <a:endParaRPr lang="en-US" sz="1250" dirty="0"/>
+          </a:p>
+          <a:p>
+            <a:pPr indent="0" marL="0">
+              <a:buNone/>
+            </a:pPr>
+            <a:r>
+              <a:rPr lang="en-US" sz="1250" dirty="0">
                 <a:solidFill>
                   <a:srgbClr val="E6EDF2"/>
                 </a:solidFill>
@@ -11648,14 +11665,14 @@
               </a:rPr>
               <a:t>        if (ball_dy &gt; 0) {</a:t>
             </a:r>
-            <a:endParaRPr lang="en-US" sz="1100" dirty="0"/>
-          </a:p>
-          <a:p>
-            <a:pPr indent="0" marL="0">
-              <a:buNone/>
-            </a:pPr>
-            <a:r>
-              <a:rPr lang="en-US" sz="1100" dirty="0">
+            <a:endParaRPr lang="en-US" sz="1250" dirty="0"/>
+          </a:p>
+          <a:p>
+            <a:pPr indent="0" marL="0">
+              <a:buNone/>
+            </a:pPr>
+            <a:r>
+              <a:rPr lang="en-US" sz="1250" dirty="0">
                 <a:solidFill>
                   <a:srgbClr val="E6EDF2"/>
                 </a:solidFill>
@@ -11669,7 +11686,7 @@
               <a:buNone/>
             </a:pPr>
             <a:r>
-              <a:rPr lang="en-US" sz="1100" dirty="0">
+              <a:rPr lang="en-US" sz="1250" dirty="0">
                 <a:solidFill>
                   <a:srgbClr val="8FB3A0"/>
                 </a:solidFill>
@@ -11677,16 +11694,16 @@
                 <a:ea typeface="Courier New" pitchFamily="34" charset="-122"/>
                 <a:cs typeface="Courier New" pitchFamily="34" charset="-120"/>
               </a:rPr>
-              <a:t>/* count only while moving down: once per hit */</a:t>
-            </a:r>
-            <a:endParaRPr lang="en-US" sz="1100" dirty="0"/>
-          </a:p>
-          <a:p>
-            <a:pPr indent="0" marL="0">
-              <a:buNone/>
-            </a:pPr>
-            <a:r>
-              <a:rPr lang="en-US" sz="1100" dirty="0">
+              <a:t>/* count only while moving down: once per</a:t>
+            </a:r>
+            <a:endParaRPr lang="en-US" sz="1250" dirty="0"/>
+          </a:p>
+          <a:p>
+            <a:pPr indent="0" marL="0">
+              <a:buNone/>
+            </a:pPr>
+            <a:r>
+              <a:rPr lang="en-US" sz="1250" dirty="0">
                 <a:solidFill>
                   <a:srgbClr val="E6EDF2"/>
                 </a:solidFill>
@@ -11694,16 +11711,16 @@
                 <a:ea typeface="Courier New" pitchFamily="34" charset="-122"/>
                 <a:cs typeface="Courier New" pitchFamily="34" charset="-120"/>
               </a:rPr>
-              <a:t>        }</a:t>
-            </a:r>
-            <a:endParaRPr lang="en-US" sz="1100" dirty="0"/>
-          </a:p>
-          <a:p>
-            <a:pPr indent="0" marL="0">
-              <a:buNone/>
-            </a:pPr>
-            <a:r>
-              <a:rPr lang="en-US" sz="1100" dirty="0">
+              <a:t>                hit */</a:t>
+            </a:r>
+            <a:endParaRPr lang="en-US" sz="1250" dirty="0"/>
+          </a:p>
+          <a:p>
+            <a:pPr indent="0" marL="0">
+              <a:buNone/>
+            </a:pPr>
+            <a:r>
+              <a:rPr lang="en-US" sz="1250" dirty="0">
                 <a:solidFill>
                   <a:srgbClr val="E6EDF2"/>
                 </a:solidFill>
@@ -11711,47 +11728,47 @@
                 <a:ea typeface="Courier New" pitchFamily="34" charset="-122"/>
                 <a:cs typeface="Courier New" pitchFamily="34" charset="-120"/>
               </a:rPr>
-              <a:t>        ball_dy = -1; </a:t>
-            </a:r>
-            <a:pPr indent="0" marL="0">
-              <a:buNone/>
-            </a:pPr>
-            <a:r>
-              <a:rPr lang="en-US" sz="1100" dirty="0">
-                <a:solidFill>
-                  <a:srgbClr val="8FB3A0"/>
+              <a:t>        }</a:t>
+            </a:r>
+            <a:endParaRPr lang="en-US" sz="1250" dirty="0"/>
+          </a:p>
+          <a:p>
+            <a:pPr indent="0" marL="0">
+              <a:buNone/>
+            </a:pPr>
+            <a:r>
+              <a:rPr lang="en-US" sz="1250" dirty="0">
+                <a:solidFill>
+                  <a:srgbClr val="E6EDF2"/>
                 </a:solidFill>
                 <a:latin typeface="Courier New" pitchFamily="34" charset="0"/>
                 <a:ea typeface="Courier New" pitchFamily="34" charset="-122"/>
                 <a:cs typeface="Courier New" pitchFamily="34" charset="-120"/>
               </a:rPr>
-              <a:t>/* assign, do not negate: safe to repeat */</a:t>
-            </a:r>
-            <a:endParaRPr lang="en-US" sz="1100" dirty="0"/>
-          </a:p>
-          <a:p>
-            <a:pPr indent="0" marL="0">
-              <a:buNone/>
-            </a:pPr>
-            <a:r>
-              <a:rPr lang="en-US" sz="1100" dirty="0">
-                <a:solidFill>
-                  <a:srgbClr val="E6EDF2"/>
+              <a:t>        ball_dy = -1; </a:t>
+            </a:r>
+            <a:pPr indent="0" marL="0">
+              <a:buNone/>
+            </a:pPr>
+            <a:r>
+              <a:rPr lang="en-US" sz="1250" dirty="0">
+                <a:solidFill>
+                  <a:srgbClr val="8FB3A0"/>
                 </a:solidFill>
                 <a:latin typeface="Courier New" pitchFamily="34" charset="0"/>
                 <a:ea typeface="Courier New" pitchFamily="34" charset="-122"/>
                 <a:cs typeface="Courier New" pitchFamily="34" charset="-120"/>
               </a:rPr>
-              <a:t>    }</a:t>
-            </a:r>
-            <a:endParaRPr lang="en-US" sz="1100" dirty="0"/>
-          </a:p>
-          <a:p>
-            <a:pPr indent="0" marL="0">
-              <a:buNone/>
-            </a:pPr>
-            <a:r>
-              <a:rPr lang="en-US" sz="1100" dirty="0">
+              <a:t>/* assign, do not negate: safe to repeat */</a:t>
+            </a:r>
+            <a:endParaRPr lang="en-US" sz="1250" dirty="0"/>
+          </a:p>
+          <a:p>
+            <a:pPr indent="0" marL="0">
+              <a:buNone/>
+            </a:pPr>
+            <a:r>
+              <a:rPr lang="en-US" sz="1250" dirty="0">
                 <a:solidFill>
                   <a:srgbClr val="E6EDF2"/>
                 </a:solidFill>
@@ -11759,9 +11776,26 @@
                 <a:ea typeface="Courier New" pitchFamily="34" charset="-122"/>
                 <a:cs typeface="Courier New" pitchFamily="34" charset="-120"/>
               </a:rPr>
+              <a:t>    }</a:t>
+            </a:r>
+            <a:endParaRPr lang="en-US" sz="1250" dirty="0"/>
+          </a:p>
+          <a:p>
+            <a:pPr indent="0" marL="0">
+              <a:buNone/>
+            </a:pPr>
+            <a:r>
+              <a:rPr lang="en-US" sz="1250" dirty="0">
+                <a:solidFill>
+                  <a:srgbClr val="E6EDF2"/>
+                </a:solidFill>
+                <a:latin typeface="Courier New" pitchFamily="34" charset="0"/>
+                <a:ea typeface="Courier New" pitchFamily="34" charset="-122"/>
+                <a:cs typeface="Courier New" pitchFamily="34" charset="-120"/>
+              </a:rPr>
               <a:t>}</a:t>
             </a:r>
-            <a:endParaRPr lang="en-US" sz="1100" dirty="0"/>
+            <a:endParaRPr lang="en-US" sz="1250" dirty="0"/>
           </a:p>
         </p:txBody>
       </p:sp>
